--- a/.doc/asis/POSON_설정_항목_전체_목록.pptx
+++ b/.doc/asis/POSON_설정_항목_전체_목록.pptx
@@ -5,18 +5,18 @@
     <p:sldMasterId id="2147483648" r:id="rId1"/>
   </p:sldMasterIdLst>
   <p:sldIdLst>
-    <p:sldId id="256" r:id="rId7"/>
-    <p:sldId id="257" r:id="rId8"/>
-    <p:sldId id="258" r:id="rId9"/>
-    <p:sldId id="259" r:id="rId10"/>
-    <p:sldId id="260" r:id="rId11"/>
-    <p:sldId id="261" r:id="rId12"/>
-    <p:sldId id="262" r:id="rId13"/>
-    <p:sldId id="263" r:id="rId14"/>
-    <p:sldId id="264" r:id="rId15"/>
-    <p:sldId id="265" r:id="rId16"/>
+    <p:sldId id="256" r:id="rId2"/>
+    <p:sldId id="257" r:id="rId3"/>
+    <p:sldId id="258" r:id="rId4"/>
+    <p:sldId id="259" r:id="rId5"/>
+    <p:sldId id="260" r:id="rId6"/>
+    <p:sldId id="261" r:id="rId7"/>
+    <p:sldId id="262" r:id="rId8"/>
+    <p:sldId id="263" r:id="rId9"/>
+    <p:sldId id="264" r:id="rId10"/>
+    <p:sldId id="265" r:id="rId11"/>
   </p:sldIdLst>
-  <p:sldSz cx="12191695" cy="6858000" type="screen4x3"/>
+  <p:sldSz cx="12192000" cy="6858000"/>
   <p:notesSz cx="6858000" cy="9144000"/>
   <p:defaultTextStyle>
     <a:defPPr>
@@ -113,6 +113,22 @@
       </a:defRPr>
     </a:lvl9pPr>
   </p:defaultTextStyle>
+  <p:extLst>
+    <p:ext uri="{EFAFB233-063F-42B5-8137-9DF3F51BA10A}">
+      <p15:sldGuideLst xmlns:p15="http://schemas.microsoft.com/office/powerpoint/2012/main">
+        <p15:guide id="1" orient="horz" pos="2160">
+          <p15:clr>
+            <a:srgbClr val="A4A3A4"/>
+          </p15:clr>
+        </p15:guide>
+        <p15:guide id="2" pos="2880">
+          <p15:clr>
+            <a:srgbClr val="A4A3A4"/>
+          </p15:clr>
+        </p15:guide>
+      </p15:sldGuideLst>
+    </p:ext>
+  </p:extLst>
 </p:presentation>
 </file>
 
@@ -297,7 +313,7 @@
           <a:p>
             <a:fld id="{5BCAD085-E8A6-8845-BD4E-CB4CCA059FC4}" type="datetimeFigureOut">
               <a:rPr lang="en-US" smtClean="0"/>
-              <a:t>1/27/13</a:t>
+              <a:t>2/19/2026</a:t>
             </a:fld>
             <a:endParaRPr lang="en-US"/>
           </a:p>
@@ -467,7 +483,7 @@
           <a:p>
             <a:fld id="{5BCAD085-E8A6-8845-BD4E-CB4CCA059FC4}" type="datetimeFigureOut">
               <a:rPr lang="en-US" smtClean="0"/>
-              <a:t>1/27/13</a:t>
+              <a:t>2/19/2026</a:t>
             </a:fld>
             <a:endParaRPr lang="en-US"/>
           </a:p>
@@ -647,7 +663,7 @@
           <a:p>
             <a:fld id="{5BCAD085-E8A6-8845-BD4E-CB4CCA059FC4}" type="datetimeFigureOut">
               <a:rPr lang="en-US" smtClean="0"/>
-              <a:t>1/27/13</a:t>
+              <a:t>2/19/2026</a:t>
             </a:fld>
             <a:endParaRPr lang="en-US"/>
           </a:p>
@@ -817,7 +833,7 @@
           <a:p>
             <a:fld id="{5BCAD085-E8A6-8845-BD4E-CB4CCA059FC4}" type="datetimeFigureOut">
               <a:rPr lang="en-US" smtClean="0"/>
-              <a:t>1/27/13</a:t>
+              <a:t>2/19/2026</a:t>
             </a:fld>
             <a:endParaRPr lang="en-US"/>
           </a:p>
@@ -1063,7 +1079,7 @@
           <a:p>
             <a:fld id="{5BCAD085-E8A6-8845-BD4E-CB4CCA059FC4}" type="datetimeFigureOut">
               <a:rPr lang="en-US" smtClean="0"/>
-              <a:t>1/27/13</a:t>
+              <a:t>2/19/2026</a:t>
             </a:fld>
             <a:endParaRPr lang="en-US"/>
           </a:p>
@@ -1351,7 +1367,7 @@
           <a:p>
             <a:fld id="{5BCAD085-E8A6-8845-BD4E-CB4CCA059FC4}" type="datetimeFigureOut">
               <a:rPr lang="en-US" smtClean="0"/>
-              <a:t>1/27/13</a:t>
+              <a:t>2/19/2026</a:t>
             </a:fld>
             <a:endParaRPr lang="en-US"/>
           </a:p>
@@ -1773,7 +1789,7 @@
           <a:p>
             <a:fld id="{5BCAD085-E8A6-8845-BD4E-CB4CCA059FC4}" type="datetimeFigureOut">
               <a:rPr lang="en-US" smtClean="0"/>
-              <a:t>1/27/13</a:t>
+              <a:t>2/19/2026</a:t>
             </a:fld>
             <a:endParaRPr lang="en-US"/>
           </a:p>
@@ -1891,7 +1907,7 @@
           <a:p>
             <a:fld id="{5BCAD085-E8A6-8845-BD4E-CB4CCA059FC4}" type="datetimeFigureOut">
               <a:rPr lang="en-US" smtClean="0"/>
-              <a:t>1/27/13</a:t>
+              <a:t>2/19/2026</a:t>
             </a:fld>
             <a:endParaRPr lang="en-US"/>
           </a:p>
@@ -1986,7 +2002,7 @@
           <a:p>
             <a:fld id="{5BCAD085-E8A6-8845-BD4E-CB4CCA059FC4}" type="datetimeFigureOut">
               <a:rPr lang="en-US" smtClean="0"/>
-              <a:t>1/27/13</a:t>
+              <a:t>2/19/2026</a:t>
             </a:fld>
             <a:endParaRPr lang="en-US"/>
           </a:p>
@@ -2263,7 +2279,7 @@
           <a:p>
             <a:fld id="{5BCAD085-E8A6-8845-BD4E-CB4CCA059FC4}" type="datetimeFigureOut">
               <a:rPr lang="en-US" smtClean="0"/>
-              <a:t>1/27/13</a:t>
+              <a:t>2/19/2026</a:t>
             </a:fld>
             <a:endParaRPr lang="en-US"/>
           </a:p>
@@ -2516,7 +2532,7 @@
           <a:p>
             <a:fld id="{5BCAD085-E8A6-8845-BD4E-CB4CCA059FC4}" type="datetimeFigureOut">
               <a:rPr lang="en-US" smtClean="0"/>
-              <a:t>1/27/13</a:t>
+              <a:t>2/19/2026</a:t>
             </a:fld>
             <a:endParaRPr lang="en-US"/>
           </a:p>
@@ -2729,7 +2745,7 @@
           <a:p>
             <a:fld id="{5BCAD085-E8A6-8845-BD4E-CB4CCA059FC4}" type="datetimeFigureOut">
               <a:rPr lang="en-US" smtClean="0"/>
-              <a:t>1/27/13</a:t>
+              <a:t>2/19/2026</a:t>
             </a:fld>
             <a:endParaRPr lang="en-US"/>
           </a:p>
@@ -3088,7 +3104,7 @@
 </file>
 
 <file path=ppt/slides/slide1.xml><?xml version="1.0" encoding="utf-8"?>
-<p:sld xmlns:a="http://schemas.openxmlformats.org/drawingml/2006/main" xmlns:p="http://schemas.openxmlformats.org/presentationml/2006/main" xmlns:r="http://schemas.openxmlformats.org/officeDocument/2006/relationships">
+<p:sld xmlns:a="http://schemas.openxmlformats.org/drawingml/2006/main" xmlns:r="http://schemas.openxmlformats.org/officeDocument/2006/relationships" xmlns:p="http://schemas.openxmlformats.org/presentationml/2006/main">
   <p:cSld>
     <p:bg>
       <p:bgPr>
@@ -3104,7 +3120,14 @@
         <p:cNvGrpSpPr/>
         <p:nvPr/>
       </p:nvGrpSpPr>
-      <p:grpSpPr/>
+      <p:grpSpPr>
+        <a:xfrm>
+          <a:off x="0" y="0"/>
+          <a:ext cx="0" cy="0"/>
+          <a:chOff x="0" y="0"/>
+          <a:chExt cx="0" cy="0"/>
+        </a:xfrm>
+      </p:grpSpPr>
       <p:sp>
         <p:nvSpPr>
           <p:cNvPr id="2" name="Rounded Rectangle 1"/>
@@ -3145,6 +3168,7 @@
           <a:lstStyle/>
           <a:p>
             <a:pPr algn="ctr"/>
+            <a:endParaRPr/>
           </a:p>
         </p:txBody>
       </p:sp>
@@ -3298,6 +3322,7 @@
           <a:lstStyle/>
           <a:p>
             <a:pPr algn="ctr"/>
+            <a:endParaRPr/>
           </a:p>
         </p:txBody>
       </p:sp>
@@ -3415,6 +3440,7 @@
           <a:lstStyle/>
           <a:p>
             <a:pPr algn="ctr"/>
+            <a:endParaRPr/>
           </a:p>
         </p:txBody>
       </p:sp>
@@ -3532,6 +3558,7 @@
           <a:lstStyle/>
           <a:p>
             <a:pPr algn="ctr"/>
+            <a:endParaRPr/>
           </a:p>
         </p:txBody>
       </p:sp>
@@ -3616,7 +3643,7 @@
 </file>
 
 <file path=ppt/slides/slide10.xml><?xml version="1.0" encoding="utf-8"?>
-<p:sld xmlns:a="http://schemas.openxmlformats.org/drawingml/2006/main" xmlns:p="http://schemas.openxmlformats.org/presentationml/2006/main" xmlns:r="http://schemas.openxmlformats.org/officeDocument/2006/relationships">
+<p:sld xmlns:a="http://schemas.openxmlformats.org/drawingml/2006/main" xmlns:r="http://schemas.openxmlformats.org/officeDocument/2006/relationships" xmlns:p="http://schemas.openxmlformats.org/presentationml/2006/main">
   <p:cSld>
     <p:bg>
       <p:bgPr>
@@ -3632,7 +3659,14 @@
         <p:cNvGrpSpPr/>
         <p:nvPr/>
       </p:nvGrpSpPr>
-      <p:grpSpPr/>
+      <p:grpSpPr>
+        <a:xfrm>
+          <a:off x="0" y="0"/>
+          <a:ext cx="0" cy="0"/>
+          <a:chOff x="0" y="0"/>
+          <a:chExt cx="0" cy="0"/>
+        </a:xfrm>
+      </p:grpSpPr>
       <p:sp>
         <p:nvSpPr>
           <p:cNvPr id="2" name="Rounded Rectangle 1"/>
@@ -3673,6 +3707,7 @@
           <a:lstStyle/>
           <a:p>
             <a:pPr algn="ctr"/>
+            <a:endParaRPr/>
           </a:p>
         </p:txBody>
       </p:sp>
@@ -3807,6 +3842,7 @@
           <a:lstStyle/>
           <a:p>
             <a:pPr algn="ctr"/>
+            <a:endParaRPr/>
           </a:p>
         </p:txBody>
       </p:sp>
@@ -4680,6 +4716,7 @@
           <a:lstStyle/>
           <a:p>
             <a:pPr algn="ctr"/>
+            <a:endParaRPr/>
           </a:p>
         </p:txBody>
       </p:sp>
@@ -4723,6 +4760,7 @@
           <a:lstStyle/>
           <a:p>
             <a:pPr algn="ctr"/>
+            <a:endParaRPr/>
           </a:p>
         </p:txBody>
       </p:sp>
@@ -4946,6 +4984,7 @@
           <a:lstStyle/>
           <a:p>
             <a:pPr algn="ctr"/>
+            <a:endParaRPr/>
           </a:p>
         </p:txBody>
       </p:sp>
@@ -5349,6 +5388,7 @@
           <a:lstStyle/>
           <a:p>
             <a:pPr algn="ctr"/>
+            <a:endParaRPr/>
           </a:p>
         </p:txBody>
       </p:sp>
@@ -5752,6 +5792,7 @@
           <a:lstStyle/>
           <a:p>
             <a:pPr algn="ctr"/>
+            <a:endParaRPr/>
           </a:p>
         </p:txBody>
       </p:sp>
@@ -5975,6 +6016,7 @@
           <a:lstStyle/>
           <a:p>
             <a:pPr algn="ctr"/>
+            <a:endParaRPr/>
           </a:p>
         </p:txBody>
       </p:sp>
@@ -6200,6 +6242,7 @@
           <a:lstStyle/>
           <a:p>
             <a:pPr algn="ctr"/>
+            <a:endParaRPr/>
           </a:p>
         </p:txBody>
       </p:sp>
@@ -6317,6 +6360,7 @@
           <a:lstStyle/>
           <a:p>
             <a:pPr algn="ctr"/>
+            <a:endParaRPr/>
           </a:p>
         </p:txBody>
       </p:sp>
@@ -6434,6 +6478,7 @@
           <a:lstStyle/>
           <a:p>
             <a:pPr algn="ctr"/>
+            <a:endParaRPr/>
           </a:p>
         </p:txBody>
       </p:sp>
@@ -6587,6 +6632,7 @@
           <a:lstStyle/>
           <a:p>
             <a:pPr algn="ctr"/>
+            <a:endParaRPr/>
           </a:p>
         </p:txBody>
       </p:sp>
@@ -7457,7 +7503,7 @@
 </file>
 
 <file path=ppt/slides/slide2.xml><?xml version="1.0" encoding="utf-8"?>
-<p:sld xmlns:a="http://schemas.openxmlformats.org/drawingml/2006/main" xmlns:p="http://schemas.openxmlformats.org/presentationml/2006/main" xmlns:r="http://schemas.openxmlformats.org/officeDocument/2006/relationships">
+<p:sld xmlns:a="http://schemas.openxmlformats.org/drawingml/2006/main" xmlns:r="http://schemas.openxmlformats.org/officeDocument/2006/relationships" xmlns:p="http://schemas.openxmlformats.org/presentationml/2006/main">
   <p:cSld>
     <p:bg>
       <p:bgPr>
@@ -7473,7 +7519,14 @@
         <p:cNvGrpSpPr/>
         <p:nvPr/>
       </p:nvGrpSpPr>
-      <p:grpSpPr/>
+      <p:grpSpPr>
+        <a:xfrm>
+          <a:off x="0" y="0"/>
+          <a:ext cx="0" cy="0"/>
+          <a:chOff x="0" y="0"/>
+          <a:chExt cx="0" cy="0"/>
+        </a:xfrm>
+      </p:grpSpPr>
       <p:sp>
         <p:nvSpPr>
           <p:cNvPr id="2" name="Rounded Rectangle 1"/>
@@ -7514,6 +7567,7 @@
           <a:lstStyle/>
           <a:p>
             <a:pPr algn="ctr"/>
+            <a:endParaRPr/>
           </a:p>
         </p:txBody>
       </p:sp>
@@ -7595,6 +7649,7 @@
           <a:lstStyle/>
           <a:p>
             <a:pPr algn="ctr"/>
+            <a:endParaRPr/>
           </a:p>
         </p:txBody>
       </p:sp>
@@ -7712,6 +7767,7 @@
           <a:lstStyle/>
           <a:p>
             <a:pPr algn="ctr"/>
+            <a:endParaRPr/>
           </a:p>
         </p:txBody>
       </p:sp>
@@ -7829,6 +7885,7 @@
           <a:lstStyle/>
           <a:p>
             <a:pPr algn="ctr"/>
+            <a:endParaRPr/>
           </a:p>
         </p:txBody>
       </p:sp>
@@ -7946,6 +8003,7 @@
           <a:lstStyle/>
           <a:p>
             <a:pPr algn="ctr"/>
+            <a:endParaRPr/>
           </a:p>
         </p:txBody>
       </p:sp>
@@ -8063,6 +8121,7 @@
           <a:lstStyle/>
           <a:p>
             <a:pPr algn="ctr"/>
+            <a:endParaRPr/>
           </a:p>
         </p:txBody>
       </p:sp>
@@ -8180,6 +8239,7 @@
           <a:lstStyle/>
           <a:p>
             <a:pPr algn="ctr"/>
+            <a:endParaRPr/>
           </a:p>
         </p:txBody>
       </p:sp>
@@ -8331,6 +8391,7 @@
           <a:lstStyle/>
           <a:p>
             <a:pPr algn="ctr"/>
+            <a:endParaRPr/>
           </a:p>
         </p:txBody>
       </p:sp>
@@ -8518,6 +8579,7 @@
           <a:lstStyle/>
           <a:p>
             <a:pPr algn="ctr"/>
+            <a:endParaRPr/>
           </a:p>
         </p:txBody>
       </p:sp>
@@ -8849,6 +8911,7 @@
           <a:lstStyle/>
           <a:p>
             <a:pPr algn="ctr"/>
+            <a:endParaRPr/>
           </a:p>
         </p:txBody>
       </p:sp>
@@ -9180,6 +9243,7 @@
           <a:lstStyle/>
           <a:p>
             <a:pPr algn="ctr"/>
+            <a:endParaRPr/>
           </a:p>
         </p:txBody>
       </p:sp>
@@ -9547,6 +9611,7 @@
           <a:lstStyle/>
           <a:p>
             <a:pPr algn="ctr"/>
+            <a:endParaRPr/>
           </a:p>
         </p:txBody>
       </p:sp>
@@ -9736,6 +9801,7 @@
           <a:lstStyle/>
           <a:p>
             <a:pPr algn="ctr"/>
+            <a:endParaRPr/>
           </a:p>
         </p:txBody>
       </p:sp>
@@ -9942,6 +10008,7 @@
           <a:lstStyle/>
           <a:p>
             <a:pPr algn="ctr"/>
+            <a:endParaRPr/>
           </a:p>
         </p:txBody>
       </p:sp>
@@ -10148,6 +10215,7 @@
           <a:lstStyle/>
           <a:p>
             <a:pPr algn="ctr"/>
+            <a:endParaRPr/>
           </a:p>
         </p:txBody>
       </p:sp>
@@ -10390,6 +10458,7 @@
           <a:lstStyle/>
           <a:p>
             <a:pPr algn="ctr"/>
+            <a:endParaRPr/>
           </a:p>
         </p:txBody>
       </p:sp>
@@ -10618,7 +10687,7 @@
 </file>
 
 <file path=ppt/slides/slide3.xml><?xml version="1.0" encoding="utf-8"?>
-<p:sld xmlns:a="http://schemas.openxmlformats.org/drawingml/2006/main" xmlns:p="http://schemas.openxmlformats.org/presentationml/2006/main" xmlns:r="http://schemas.openxmlformats.org/officeDocument/2006/relationships">
+<p:sld xmlns:a="http://schemas.openxmlformats.org/drawingml/2006/main" xmlns:r="http://schemas.openxmlformats.org/officeDocument/2006/relationships" xmlns:p="http://schemas.openxmlformats.org/presentationml/2006/main">
   <p:cSld>
     <p:bg>
       <p:bgPr>
@@ -10634,7 +10703,14 @@
         <p:cNvGrpSpPr/>
         <p:nvPr/>
       </p:nvGrpSpPr>
-      <p:grpSpPr/>
+      <p:grpSpPr>
+        <a:xfrm>
+          <a:off x="0" y="0"/>
+          <a:ext cx="0" cy="0"/>
+          <a:chOff x="0" y="0"/>
+          <a:chExt cx="0" cy="0"/>
+        </a:xfrm>
+      </p:grpSpPr>
       <p:sp>
         <p:nvSpPr>
           <p:cNvPr id="2" name="Rounded Rectangle 1"/>
@@ -10675,6 +10751,7 @@
           <a:lstStyle/>
           <a:p>
             <a:pPr algn="ctr"/>
+            <a:endParaRPr/>
           </a:p>
         </p:txBody>
       </p:sp>
@@ -14373,6 +14450,7 @@
           <a:lstStyle/>
           <a:p>
             <a:pPr algn="ctr"/>
+            <a:endParaRPr/>
           </a:p>
         </p:txBody>
       </p:sp>
@@ -14919,7 +14997,7 @@
 </file>
 
 <file path=ppt/slides/slide4.xml><?xml version="1.0" encoding="utf-8"?>
-<p:sld xmlns:a="http://schemas.openxmlformats.org/drawingml/2006/main" xmlns:p="http://schemas.openxmlformats.org/presentationml/2006/main" xmlns:r="http://schemas.openxmlformats.org/officeDocument/2006/relationships">
+<p:sld xmlns:a="http://schemas.openxmlformats.org/drawingml/2006/main" xmlns:r="http://schemas.openxmlformats.org/officeDocument/2006/relationships" xmlns:p="http://schemas.openxmlformats.org/presentationml/2006/main">
   <p:cSld>
     <p:bg>
       <p:bgPr>
@@ -14935,7 +15013,14 @@
         <p:cNvGrpSpPr/>
         <p:nvPr/>
       </p:nvGrpSpPr>
-      <p:grpSpPr/>
+      <p:grpSpPr>
+        <a:xfrm>
+          <a:off x="0" y="0"/>
+          <a:ext cx="0" cy="0"/>
+          <a:chOff x="0" y="0"/>
+          <a:chExt cx="0" cy="0"/>
+        </a:xfrm>
+      </p:grpSpPr>
       <p:sp>
         <p:nvSpPr>
           <p:cNvPr id="2" name="Rounded Rectangle 1"/>
@@ -14976,6 +15061,7 @@
           <a:lstStyle/>
           <a:p>
             <a:pPr algn="ctr"/>
+            <a:endParaRPr/>
           </a:p>
         </p:txBody>
       </p:sp>
@@ -17525,7 +17611,7 @@
 </file>
 
 <file path=ppt/slides/slide5.xml><?xml version="1.0" encoding="utf-8"?>
-<p:sld xmlns:a="http://schemas.openxmlformats.org/drawingml/2006/main" xmlns:p="http://schemas.openxmlformats.org/presentationml/2006/main" xmlns:r="http://schemas.openxmlformats.org/officeDocument/2006/relationships">
+<p:sld xmlns:a="http://schemas.openxmlformats.org/drawingml/2006/main" xmlns:r="http://schemas.openxmlformats.org/officeDocument/2006/relationships" xmlns:p="http://schemas.openxmlformats.org/presentationml/2006/main">
   <p:cSld>
     <p:bg>
       <p:bgPr>
@@ -17541,7 +17627,14 @@
         <p:cNvGrpSpPr/>
         <p:nvPr/>
       </p:nvGrpSpPr>
-      <p:grpSpPr/>
+      <p:grpSpPr>
+        <a:xfrm>
+          <a:off x="0" y="0"/>
+          <a:ext cx="0" cy="0"/>
+          <a:chOff x="0" y="0"/>
+          <a:chExt cx="0" cy="0"/>
+        </a:xfrm>
+      </p:grpSpPr>
       <p:sp>
         <p:nvSpPr>
           <p:cNvPr id="2" name="Rounded Rectangle 1"/>
@@ -17582,6 +17675,7 @@
           <a:lstStyle/>
           <a:p>
             <a:pPr algn="ctr"/>
+            <a:endParaRPr/>
           </a:p>
         </p:txBody>
       </p:sp>
@@ -17769,6 +17863,7 @@
           <a:lstStyle/>
           <a:p>
             <a:pPr algn="ctr"/>
+            <a:endParaRPr/>
           </a:p>
         </p:txBody>
       </p:sp>
@@ -18839,6 +18934,7 @@
           <a:lstStyle/>
           <a:p>
             <a:pPr algn="ctr"/>
+            <a:endParaRPr/>
           </a:p>
         </p:txBody>
       </p:sp>
@@ -19477,6 +19573,7 @@
           <a:lstStyle/>
           <a:p>
             <a:pPr algn="ctr"/>
+            <a:endParaRPr/>
           </a:p>
         </p:txBody>
       </p:sp>
@@ -20547,6 +20644,7 @@
           <a:lstStyle/>
           <a:p>
             <a:pPr algn="ctr"/>
+            <a:endParaRPr/>
           </a:p>
         </p:txBody>
       </p:sp>
@@ -20955,7 +21053,7 @@
 </file>
 
 <file path=ppt/slides/slide6.xml><?xml version="1.0" encoding="utf-8"?>
-<p:sld xmlns:a="http://schemas.openxmlformats.org/drawingml/2006/main" xmlns:p="http://schemas.openxmlformats.org/presentationml/2006/main" xmlns:r="http://schemas.openxmlformats.org/officeDocument/2006/relationships">
+<p:sld xmlns:a="http://schemas.openxmlformats.org/drawingml/2006/main" xmlns:r="http://schemas.openxmlformats.org/officeDocument/2006/relationships" xmlns:p="http://schemas.openxmlformats.org/presentationml/2006/main">
   <p:cSld>
     <p:bg>
       <p:bgPr>
@@ -20971,7 +21069,14 @@
         <p:cNvGrpSpPr/>
         <p:nvPr/>
       </p:nvGrpSpPr>
-      <p:grpSpPr/>
+      <p:grpSpPr>
+        <a:xfrm>
+          <a:off x="0" y="0"/>
+          <a:ext cx="0" cy="0"/>
+          <a:chOff x="0" y="0"/>
+          <a:chExt cx="0" cy="0"/>
+        </a:xfrm>
+      </p:grpSpPr>
       <p:sp>
         <p:nvSpPr>
           <p:cNvPr id="2" name="Rounded Rectangle 1"/>
@@ -21012,6 +21117,7 @@
           <a:lstStyle/>
           <a:p>
             <a:pPr algn="ctr"/>
+            <a:endParaRPr/>
           </a:p>
         </p:txBody>
       </p:sp>
@@ -21218,6 +21324,7 @@
           <a:lstStyle/>
           <a:p>
             <a:pPr algn="ctr"/>
+            <a:endParaRPr/>
           </a:p>
         </p:txBody>
       </p:sp>
@@ -23891,6 +23998,7 @@
           <a:lstStyle/>
           <a:p>
             <a:pPr algn="ctr"/>
+            <a:endParaRPr/>
           </a:p>
         </p:txBody>
       </p:sp>
@@ -24875,7 +24983,7 @@
 </file>
 
 <file path=ppt/slides/slide7.xml><?xml version="1.0" encoding="utf-8"?>
-<p:sld xmlns:a="http://schemas.openxmlformats.org/drawingml/2006/main" xmlns:p="http://schemas.openxmlformats.org/presentationml/2006/main" xmlns:r="http://schemas.openxmlformats.org/officeDocument/2006/relationships">
+<p:sld xmlns:a="http://schemas.openxmlformats.org/drawingml/2006/main" xmlns:r="http://schemas.openxmlformats.org/officeDocument/2006/relationships" xmlns:p="http://schemas.openxmlformats.org/presentationml/2006/main">
   <p:cSld>
     <p:bg>
       <p:bgPr>
@@ -24891,7 +24999,14 @@
         <p:cNvGrpSpPr/>
         <p:nvPr/>
       </p:nvGrpSpPr>
-      <p:grpSpPr/>
+      <p:grpSpPr>
+        <a:xfrm>
+          <a:off x="0" y="0"/>
+          <a:ext cx="0" cy="0"/>
+          <a:chOff x="0" y="0"/>
+          <a:chExt cx="0" cy="0"/>
+        </a:xfrm>
+      </p:grpSpPr>
       <p:sp>
         <p:nvSpPr>
           <p:cNvPr id="2" name="Rounded Rectangle 1"/>
@@ -24932,6 +25047,7 @@
           <a:lstStyle/>
           <a:p>
             <a:pPr algn="ctr"/>
+            <a:endParaRPr/>
           </a:p>
         </p:txBody>
       </p:sp>
@@ -25102,6 +25218,7 @@
           <a:lstStyle/>
           <a:p>
             <a:pPr algn="ctr"/>
+            <a:endParaRPr/>
           </a:p>
         </p:txBody>
       </p:sp>
@@ -26083,6 +26200,7 @@
           <a:lstStyle/>
           <a:p>
             <a:pPr algn="ctr"/>
+            <a:endParaRPr/>
           </a:p>
         </p:txBody>
       </p:sp>
@@ -27064,6 +27182,7 @@
           <a:lstStyle/>
           <a:p>
             <a:pPr algn="ctr"/>
+            <a:endParaRPr/>
           </a:p>
         </p:txBody>
       </p:sp>
@@ -27940,7 +28059,7 @@
 </file>
 
 <file path=ppt/slides/slide8.xml><?xml version="1.0" encoding="utf-8"?>
-<p:sld xmlns:a="http://schemas.openxmlformats.org/drawingml/2006/main" xmlns:p="http://schemas.openxmlformats.org/presentationml/2006/main" xmlns:r="http://schemas.openxmlformats.org/officeDocument/2006/relationships">
+<p:sld xmlns:a="http://schemas.openxmlformats.org/drawingml/2006/main" xmlns:r="http://schemas.openxmlformats.org/officeDocument/2006/relationships" xmlns:p="http://schemas.openxmlformats.org/presentationml/2006/main">
   <p:cSld>
     <p:bg>
       <p:bgPr>
@@ -27956,7 +28075,14 @@
         <p:cNvGrpSpPr/>
         <p:nvPr/>
       </p:nvGrpSpPr>
-      <p:grpSpPr/>
+      <p:grpSpPr>
+        <a:xfrm>
+          <a:off x="0" y="0"/>
+          <a:ext cx="0" cy="0"/>
+          <a:chOff x="0" y="0"/>
+          <a:chExt cx="0" cy="0"/>
+        </a:xfrm>
+      </p:grpSpPr>
       <p:sp>
         <p:nvSpPr>
           <p:cNvPr id="2" name="Rounded Rectangle 1"/>
@@ -27997,6 +28123,7 @@
           <a:lstStyle/>
           <a:p>
             <a:pPr algn="ctr"/>
+            <a:endParaRPr/>
           </a:p>
         </p:txBody>
       </p:sp>
@@ -28184,6 +28311,7 @@
           <a:lstStyle/>
           <a:p>
             <a:pPr algn="ctr"/>
+            <a:endParaRPr/>
           </a:p>
         </p:txBody>
       </p:sp>
@@ -28261,42 +28389,6 @@
       </p:sp>
       <p:sp>
         <p:nvSpPr>
-          <p:cNvPr id="9" name="TextBox 8"/>
-          <p:cNvSpPr txBox="1"/>
-          <p:nvPr/>
-        </p:nvSpPr>
-        <p:spPr>
-          <a:xfrm>
-            <a:off x="4480560" y="1097280"/>
-            <a:ext cx="731520" cy="219456"/>
-          </a:xfrm>
-          <a:prstGeom prst="rect">
-            <a:avLst/>
-          </a:prstGeom>
-          <a:noFill/>
-        </p:spPr>
-        <p:txBody>
-          <a:bodyPr wrap="square">
-            <a:spAutoFit/>
-          </a:bodyPr>
-          <a:lstStyle/>
-          <a:p>
-            <a:pPr algn="l">
-              <a:defRPr sz="800" b="0">
-                <a:solidFill>
-                  <a:srgbClr val="A78BFA"/>
-                </a:solidFill>
-                <a:latin typeface="Malgun Gothic"/>
-              </a:defRPr>
-            </a:pPr>
-            <a:r>
-              <a:t>select</a:t>
-            </a:r>
-          </a:p>
-        </p:txBody>
-      </p:sp>
-      <p:sp>
-        <p:nvSpPr>
           <p:cNvPr id="10" name="TextBox 9"/>
           <p:cNvSpPr txBox="1"/>
           <p:nvPr/>
@@ -28369,42 +28461,6 @@
       </p:sp>
       <p:sp>
         <p:nvSpPr>
-          <p:cNvPr id="12" name="TextBox 11"/>
-          <p:cNvSpPr txBox="1"/>
-          <p:nvPr/>
-        </p:nvSpPr>
-        <p:spPr>
-          <a:xfrm>
-            <a:off x="4480560" y="1335024"/>
-            <a:ext cx="731520" cy="219456"/>
-          </a:xfrm>
-          <a:prstGeom prst="rect">
-            <a:avLst/>
-          </a:prstGeom>
-          <a:noFill/>
-        </p:spPr>
-        <p:txBody>
-          <a:bodyPr wrap="square">
-            <a:spAutoFit/>
-          </a:bodyPr>
-          <a:lstStyle/>
-          <a:p>
-            <a:pPr algn="l">
-              <a:defRPr sz="800" b="0">
-                <a:solidFill>
-                  <a:srgbClr val="A78BFA"/>
-                </a:solidFill>
-                <a:latin typeface="Malgun Gothic"/>
-              </a:defRPr>
-            </a:pPr>
-            <a:r>
-              <a:t>select</a:t>
-            </a:r>
-          </a:p>
-        </p:txBody>
-      </p:sp>
-      <p:sp>
-        <p:nvSpPr>
           <p:cNvPr id="13" name="TextBox 12"/>
           <p:cNvSpPr txBox="1"/>
           <p:nvPr/>
@@ -28477,42 +28533,6 @@
       </p:sp>
       <p:sp>
         <p:nvSpPr>
-          <p:cNvPr id="15" name="TextBox 14"/>
-          <p:cNvSpPr txBox="1"/>
-          <p:nvPr/>
-        </p:nvSpPr>
-        <p:spPr>
-          <a:xfrm>
-            <a:off x="4480560" y="1572768"/>
-            <a:ext cx="731520" cy="219456"/>
-          </a:xfrm>
-          <a:prstGeom prst="rect">
-            <a:avLst/>
-          </a:prstGeom>
-          <a:noFill/>
-        </p:spPr>
-        <p:txBody>
-          <a:bodyPr wrap="square">
-            <a:spAutoFit/>
-          </a:bodyPr>
-          <a:lstStyle/>
-          <a:p>
-            <a:pPr algn="l">
-              <a:defRPr sz="800" b="0">
-                <a:solidFill>
-                  <a:srgbClr val="A78BFA"/>
-                </a:solidFill>
-                <a:latin typeface="Malgun Gothic"/>
-              </a:defRPr>
-            </a:pPr>
-            <a:r>
-              <a:t>select</a:t>
-            </a:r>
-          </a:p>
-        </p:txBody>
-      </p:sp>
-      <p:sp>
-        <p:nvSpPr>
           <p:cNvPr id="16" name="TextBox 15"/>
           <p:cNvSpPr txBox="1"/>
           <p:nvPr/>
@@ -28585,42 +28605,6 @@
       </p:sp>
       <p:sp>
         <p:nvSpPr>
-          <p:cNvPr id="18" name="TextBox 17"/>
-          <p:cNvSpPr txBox="1"/>
-          <p:nvPr/>
-        </p:nvSpPr>
-        <p:spPr>
-          <a:xfrm>
-            <a:off x="4480560" y="1810512"/>
-            <a:ext cx="731520" cy="219456"/>
-          </a:xfrm>
-          <a:prstGeom prst="rect">
-            <a:avLst/>
-          </a:prstGeom>
-          <a:noFill/>
-        </p:spPr>
-        <p:txBody>
-          <a:bodyPr wrap="square">
-            <a:spAutoFit/>
-          </a:bodyPr>
-          <a:lstStyle/>
-          <a:p>
-            <a:pPr algn="l">
-              <a:defRPr sz="800" b="0">
-                <a:solidFill>
-                  <a:srgbClr val="A78BFA"/>
-                </a:solidFill>
-                <a:latin typeface="Malgun Gothic"/>
-              </a:defRPr>
-            </a:pPr>
-            <a:r>
-              <a:t>select</a:t>
-            </a:r>
-          </a:p>
-        </p:txBody>
-      </p:sp>
-      <p:sp>
-        <p:nvSpPr>
           <p:cNvPr id="19" name="TextBox 18"/>
           <p:cNvSpPr txBox="1"/>
           <p:nvPr/>
@@ -28693,42 +28677,6 @@
       </p:sp>
       <p:sp>
         <p:nvSpPr>
-          <p:cNvPr id="21" name="TextBox 20"/>
-          <p:cNvSpPr txBox="1"/>
-          <p:nvPr/>
-        </p:nvSpPr>
-        <p:spPr>
-          <a:xfrm>
-            <a:off x="4480560" y="2048256"/>
-            <a:ext cx="731520" cy="219456"/>
-          </a:xfrm>
-          <a:prstGeom prst="rect">
-            <a:avLst/>
-          </a:prstGeom>
-          <a:noFill/>
-        </p:spPr>
-        <p:txBody>
-          <a:bodyPr wrap="square">
-            <a:spAutoFit/>
-          </a:bodyPr>
-          <a:lstStyle/>
-          <a:p>
-            <a:pPr algn="l">
-              <a:defRPr sz="800" b="0">
-                <a:solidFill>
-                  <a:srgbClr val="38BDF8"/>
-                </a:solidFill>
-                <a:latin typeface="Malgun Gothic"/>
-              </a:defRPr>
-            </a:pPr>
-            <a:r>
-              <a:t>number</a:t>
-            </a:r>
-          </a:p>
-        </p:txBody>
-      </p:sp>
-      <p:sp>
-        <p:nvSpPr>
           <p:cNvPr id="22" name="TextBox 21"/>
           <p:cNvSpPr txBox="1"/>
           <p:nvPr/>
@@ -28801,42 +28749,6 @@
       </p:sp>
       <p:sp>
         <p:nvSpPr>
-          <p:cNvPr id="24" name="TextBox 23"/>
-          <p:cNvSpPr txBox="1"/>
-          <p:nvPr/>
-        </p:nvSpPr>
-        <p:spPr>
-          <a:xfrm>
-            <a:off x="4480560" y="2286000"/>
-            <a:ext cx="731520" cy="219456"/>
-          </a:xfrm>
-          <a:prstGeom prst="rect">
-            <a:avLst/>
-          </a:prstGeom>
-          <a:noFill/>
-        </p:spPr>
-        <p:txBody>
-          <a:bodyPr wrap="square">
-            <a:spAutoFit/>
-          </a:bodyPr>
-          <a:lstStyle/>
-          <a:p>
-            <a:pPr algn="l">
-              <a:defRPr sz="800" b="0">
-                <a:solidFill>
-                  <a:srgbClr val="38BDF8"/>
-                </a:solidFill>
-                <a:latin typeface="Malgun Gothic"/>
-              </a:defRPr>
-            </a:pPr>
-            <a:r>
-              <a:t>number</a:t>
-            </a:r>
-          </a:p>
-        </p:txBody>
-      </p:sp>
-      <p:sp>
-        <p:nvSpPr>
           <p:cNvPr id="25" name="TextBox 24"/>
           <p:cNvSpPr txBox="1"/>
           <p:nvPr/>
@@ -28909,42 +28821,6 @@
       </p:sp>
       <p:sp>
         <p:nvSpPr>
-          <p:cNvPr id="27" name="TextBox 26"/>
-          <p:cNvSpPr txBox="1"/>
-          <p:nvPr/>
-        </p:nvSpPr>
-        <p:spPr>
-          <a:xfrm>
-            <a:off x="4480560" y="2523744"/>
-            <a:ext cx="731520" cy="219456"/>
-          </a:xfrm>
-          <a:prstGeom prst="rect">
-            <a:avLst/>
-          </a:prstGeom>
-          <a:noFill/>
-        </p:spPr>
-        <p:txBody>
-          <a:bodyPr wrap="square">
-            <a:spAutoFit/>
-          </a:bodyPr>
-          <a:lstStyle/>
-          <a:p>
-            <a:pPr algn="l">
-              <a:defRPr sz="800" b="0">
-                <a:solidFill>
-                  <a:srgbClr val="38BDF8"/>
-                </a:solidFill>
-                <a:latin typeface="Malgun Gothic"/>
-              </a:defRPr>
-            </a:pPr>
-            <a:r>
-              <a:t>number</a:t>
-            </a:r>
-          </a:p>
-        </p:txBody>
-      </p:sp>
-      <p:sp>
-        <p:nvSpPr>
           <p:cNvPr id="28" name="TextBox 27"/>
           <p:cNvSpPr txBox="1"/>
           <p:nvPr/>
@@ -29017,42 +28893,6 @@
       </p:sp>
       <p:sp>
         <p:nvSpPr>
-          <p:cNvPr id="30" name="TextBox 29"/>
-          <p:cNvSpPr txBox="1"/>
-          <p:nvPr/>
-        </p:nvSpPr>
-        <p:spPr>
-          <a:xfrm>
-            <a:off x="4480560" y="2761488"/>
-            <a:ext cx="731520" cy="219456"/>
-          </a:xfrm>
-          <a:prstGeom prst="rect">
-            <a:avLst/>
-          </a:prstGeom>
-          <a:noFill/>
-        </p:spPr>
-        <p:txBody>
-          <a:bodyPr wrap="square">
-            <a:spAutoFit/>
-          </a:bodyPr>
-          <a:lstStyle/>
-          <a:p>
-            <a:pPr algn="l">
-              <a:defRPr sz="800" b="0">
-                <a:solidFill>
-                  <a:srgbClr val="38BDF8"/>
-                </a:solidFill>
-                <a:latin typeface="Malgun Gothic"/>
-              </a:defRPr>
-            </a:pPr>
-            <a:r>
-              <a:t>number</a:t>
-            </a:r>
-          </a:p>
-        </p:txBody>
-      </p:sp>
-      <p:sp>
-        <p:nvSpPr>
           <p:cNvPr id="31" name="TextBox 30"/>
           <p:cNvSpPr txBox="1"/>
           <p:nvPr/>
@@ -29125,42 +28965,6 @@
       </p:sp>
       <p:sp>
         <p:nvSpPr>
-          <p:cNvPr id="33" name="TextBox 32"/>
-          <p:cNvSpPr txBox="1"/>
-          <p:nvPr/>
-        </p:nvSpPr>
-        <p:spPr>
-          <a:xfrm>
-            <a:off x="4480560" y="2999232"/>
-            <a:ext cx="731520" cy="219456"/>
-          </a:xfrm>
-          <a:prstGeom prst="rect">
-            <a:avLst/>
-          </a:prstGeom>
-          <a:noFill/>
-        </p:spPr>
-        <p:txBody>
-          <a:bodyPr wrap="square">
-            <a:spAutoFit/>
-          </a:bodyPr>
-          <a:lstStyle/>
-          <a:p>
-            <a:pPr algn="l">
-              <a:defRPr sz="800" b="0">
-                <a:solidFill>
-                  <a:srgbClr val="38BDF8"/>
-                </a:solidFill>
-                <a:latin typeface="Malgun Gothic"/>
-              </a:defRPr>
-            </a:pPr>
-            <a:r>
-              <a:t>number</a:t>
-            </a:r>
-          </a:p>
-        </p:txBody>
-      </p:sp>
-      <p:sp>
-        <p:nvSpPr>
           <p:cNvPr id="34" name="TextBox 33"/>
           <p:cNvSpPr txBox="1"/>
           <p:nvPr/>
@@ -29227,42 +29031,6 @@
             </a:pPr>
             <a:r>
               <a:t>BC 파트너스</a:t>
-            </a:r>
-          </a:p>
-        </p:txBody>
-      </p:sp>
-      <p:sp>
-        <p:nvSpPr>
-          <p:cNvPr id="36" name="TextBox 35"/>
-          <p:cNvSpPr txBox="1"/>
-          <p:nvPr/>
-        </p:nvSpPr>
-        <p:spPr>
-          <a:xfrm>
-            <a:off x="4480560" y="3236976"/>
-            <a:ext cx="731520" cy="219456"/>
-          </a:xfrm>
-          <a:prstGeom prst="rect">
-            <a:avLst/>
-          </a:prstGeom>
-          <a:noFill/>
-        </p:spPr>
-        <p:txBody>
-          <a:bodyPr wrap="square">
-            <a:spAutoFit/>
-          </a:bodyPr>
-          <a:lstStyle/>
-          <a:p>
-            <a:pPr algn="l">
-              <a:defRPr sz="800" b="0">
-                <a:solidFill>
-                  <a:srgbClr val="4ADE80"/>
-                </a:solidFill>
-                <a:latin typeface="Malgun Gothic"/>
-              </a:defRPr>
-            </a:pPr>
-            <a:r>
-              <a:t>toggle</a:t>
             </a:r>
           </a:p>
         </p:txBody>
@@ -29470,6 +29238,7 @@
           <a:lstStyle/>
           <a:p>
             <a:pPr algn="ctr"/>
+            <a:endParaRPr/>
           </a:p>
         </p:txBody>
       </p:sp>
@@ -30000,6 +29769,7 @@
           <a:lstStyle/>
           <a:p>
             <a:pPr algn="ctr"/>
+            <a:endParaRPr/>
           </a:p>
         </p:txBody>
       </p:sp>
@@ -30549,6 +30319,7 @@
           <a:lstStyle/>
           <a:p>
             <a:pPr algn="ctr"/>
+            <a:endParaRPr/>
           </a:p>
         </p:txBody>
       </p:sp>
@@ -30990,6 +30761,7 @@
           <a:lstStyle/>
           <a:p>
             <a:pPr algn="ctr"/>
+            <a:endParaRPr/>
           </a:p>
         </p:txBody>
       </p:sp>
@@ -31067,42 +30839,6 @@
       </p:sp>
       <p:sp>
         <p:nvSpPr>
-          <p:cNvPr id="85" name="TextBox 84"/>
-          <p:cNvSpPr txBox="1"/>
-          <p:nvPr/>
-        </p:nvSpPr>
-        <p:spPr>
-          <a:xfrm>
-            <a:off x="8412480" y="5303520"/>
-            <a:ext cx="731520" cy="219456"/>
-          </a:xfrm>
-          <a:prstGeom prst="rect">
-            <a:avLst/>
-          </a:prstGeom>
-          <a:noFill/>
-        </p:spPr>
-        <p:txBody>
-          <a:bodyPr wrap="square">
-            <a:spAutoFit/>
-          </a:bodyPr>
-          <a:lstStyle/>
-          <a:p>
-            <a:pPr algn="l">
-              <a:defRPr sz="800" b="0">
-                <a:solidFill>
-                  <a:srgbClr val="FBBF24"/>
-                </a:solidFill>
-                <a:latin typeface="Malgun Gothic"/>
-              </a:defRPr>
-            </a:pPr>
-            <a:r>
-              <a:t>text</a:t>
-            </a:r>
-          </a:p>
-        </p:txBody>
-      </p:sp>
-      <p:sp>
-        <p:nvSpPr>
           <p:cNvPr id="86" name="TextBox 85"/>
           <p:cNvSpPr txBox="1"/>
           <p:nvPr/>
@@ -31175,42 +30911,6 @@
       </p:sp>
       <p:sp>
         <p:nvSpPr>
-          <p:cNvPr id="88" name="TextBox 87"/>
-          <p:cNvSpPr txBox="1"/>
-          <p:nvPr/>
-        </p:nvSpPr>
-        <p:spPr>
-          <a:xfrm>
-            <a:off x="8412480" y="5541264"/>
-            <a:ext cx="731520" cy="219456"/>
-          </a:xfrm>
-          <a:prstGeom prst="rect">
-            <a:avLst/>
-          </a:prstGeom>
-          <a:noFill/>
-        </p:spPr>
-        <p:txBody>
-          <a:bodyPr wrap="square">
-            <a:spAutoFit/>
-          </a:bodyPr>
-          <a:lstStyle/>
-          <a:p>
-            <a:pPr algn="l">
-              <a:defRPr sz="800" b="0">
-                <a:solidFill>
-                  <a:srgbClr val="FBBF24"/>
-                </a:solidFill>
-                <a:latin typeface="Malgun Gothic"/>
-              </a:defRPr>
-            </a:pPr>
-            <a:r>
-              <a:t>text</a:t>
-            </a:r>
-          </a:p>
-        </p:txBody>
-      </p:sp>
-      <p:sp>
-        <p:nvSpPr>
           <p:cNvPr id="89" name="TextBox 88"/>
           <p:cNvSpPr txBox="1"/>
           <p:nvPr/>
@@ -31283,42 +30983,6 @@
       </p:sp>
       <p:sp>
         <p:nvSpPr>
-          <p:cNvPr id="91" name="TextBox 90"/>
-          <p:cNvSpPr txBox="1"/>
-          <p:nvPr/>
-        </p:nvSpPr>
-        <p:spPr>
-          <a:xfrm>
-            <a:off x="8412480" y="5779008"/>
-            <a:ext cx="731520" cy="219456"/>
-          </a:xfrm>
-          <a:prstGeom prst="rect">
-            <a:avLst/>
-          </a:prstGeom>
-          <a:noFill/>
-        </p:spPr>
-        <p:txBody>
-          <a:bodyPr wrap="square">
-            <a:spAutoFit/>
-          </a:bodyPr>
-          <a:lstStyle/>
-          <a:p>
-            <a:pPr algn="l">
-              <a:defRPr sz="800" b="0">
-                <a:solidFill>
-                  <a:srgbClr val="FBBF24"/>
-                </a:solidFill>
-                <a:latin typeface="Malgun Gothic"/>
-              </a:defRPr>
-            </a:pPr>
-            <a:r>
-              <a:t>text</a:t>
-            </a:r>
-          </a:p>
-        </p:txBody>
-      </p:sp>
-      <p:sp>
-        <p:nvSpPr>
           <p:cNvPr id="92" name="TextBox 91"/>
           <p:cNvSpPr txBox="1"/>
           <p:nvPr/>
@@ -31385,42 +31049,6 @@
             </a:pPr>
             <a:r>
               <a:t>영수증 하단 메시지 3</a:t>
-            </a:r>
-          </a:p>
-        </p:txBody>
-      </p:sp>
-      <p:sp>
-        <p:nvSpPr>
-          <p:cNvPr id="94" name="TextBox 93"/>
-          <p:cNvSpPr txBox="1"/>
-          <p:nvPr/>
-        </p:nvSpPr>
-        <p:spPr>
-          <a:xfrm>
-            <a:off x="8412480" y="6016752"/>
-            <a:ext cx="731520" cy="219456"/>
-          </a:xfrm>
-          <a:prstGeom prst="rect">
-            <a:avLst/>
-          </a:prstGeom>
-          <a:noFill/>
-        </p:spPr>
-        <p:txBody>
-          <a:bodyPr wrap="square">
-            <a:spAutoFit/>
-          </a:bodyPr>
-          <a:lstStyle/>
-          <a:p>
-            <a:pPr algn="l">
-              <a:defRPr sz="800" b="0">
-                <a:solidFill>
-                  <a:srgbClr val="FBBF24"/>
-                </a:solidFill>
-                <a:latin typeface="Malgun Gothic"/>
-              </a:defRPr>
-            </a:pPr>
-            <a:r>
-              <a:t>text</a:t>
             </a:r>
           </a:p>
         </p:txBody>
@@ -31467,6 +31095,7 @@
           <a:lstStyle/>
           <a:p>
             <a:pPr algn="ctr"/>
+            <a:endParaRPr/>
           </a:p>
         </p:txBody>
       </p:sp>
@@ -31618,6 +31247,7 @@
           <a:lstStyle/>
           <a:p>
             <a:pPr algn="ctr"/>
+            <a:endParaRPr/>
           </a:p>
         </p:txBody>
       </p:sp>
@@ -31733,6 +31363,7 @@
           <a:lstStyle/>
           <a:p>
             <a:pPr algn="ctr"/>
+            <a:endParaRPr/>
           </a:p>
         </p:txBody>
       </p:sp>
@@ -31848,6 +31479,7 @@
           <a:lstStyle/>
           <a:p>
             <a:pPr algn="ctr"/>
+            <a:endParaRPr/>
           </a:p>
         </p:txBody>
       </p:sp>
@@ -31963,6 +31595,7 @@
           <a:lstStyle/>
           <a:p>
             <a:pPr algn="ctr"/>
+            <a:endParaRPr/>
           </a:p>
         </p:txBody>
       </p:sp>
@@ -32078,6 +31711,7 @@
           <a:lstStyle/>
           <a:p>
             <a:pPr algn="ctr"/>
+            <a:endParaRPr/>
           </a:p>
         </p:txBody>
       </p:sp>
@@ -32193,6 +31827,7 @@
           <a:lstStyle/>
           <a:p>
             <a:pPr algn="ctr"/>
+            <a:endParaRPr/>
           </a:p>
         </p:txBody>
       </p:sp>
@@ -32313,7 +31948,7 @@
 </file>
 
 <file path=ppt/slides/slide9.xml><?xml version="1.0" encoding="utf-8"?>
-<p:sld xmlns:a="http://schemas.openxmlformats.org/drawingml/2006/main" xmlns:p="http://schemas.openxmlformats.org/presentationml/2006/main" xmlns:r="http://schemas.openxmlformats.org/officeDocument/2006/relationships">
+<p:sld xmlns:a="http://schemas.openxmlformats.org/drawingml/2006/main" xmlns:r="http://schemas.openxmlformats.org/officeDocument/2006/relationships" xmlns:p="http://schemas.openxmlformats.org/presentationml/2006/main">
   <p:cSld>
     <p:bg>
       <p:bgPr>
@@ -32329,7 +31964,14 @@
         <p:cNvGrpSpPr/>
         <p:nvPr/>
       </p:nvGrpSpPr>
-      <p:grpSpPr/>
+      <p:grpSpPr>
+        <a:xfrm>
+          <a:off x="0" y="0"/>
+          <a:ext cx="0" cy="0"/>
+          <a:chOff x="0" y="0"/>
+          <a:chExt cx="0" cy="0"/>
+        </a:xfrm>
+      </p:grpSpPr>
       <p:sp>
         <p:nvSpPr>
           <p:cNvPr id="2" name="Rounded Rectangle 1"/>
@@ -32370,6 +32012,7 @@
           <a:lstStyle/>
           <a:p>
             <a:pPr algn="ctr"/>
+            <a:endParaRPr/>
           </a:p>
         </p:txBody>
       </p:sp>
@@ -32593,6 +32236,7 @@
           <a:lstStyle/>
           <a:p>
             <a:pPr algn="ctr"/>
+            <a:endParaRPr/>
           </a:p>
         </p:txBody>
       </p:sp>
@@ -33771,6 +33415,7 @@
           <a:lstStyle/>
           <a:p>
             <a:pPr algn="ctr"/>
+            <a:endParaRPr/>
           </a:p>
         </p:txBody>
       </p:sp>
@@ -34517,6 +34162,7 @@
           <a:lstStyle/>
           <a:p>
             <a:pPr algn="ctr"/>
+            <a:endParaRPr/>
           </a:p>
         </p:txBody>
       </p:sp>
@@ -35479,6 +35125,7 @@
           <a:lstStyle/>
           <a:p>
             <a:pPr algn="ctr"/>
+            <a:endParaRPr/>
           </a:p>
         </p:txBody>
       </p:sp>
@@ -36765,6 +36412,7 @@
           <a:lstStyle/>
           <a:p>
             <a:pPr algn="ctr"/>
+            <a:endParaRPr/>
           </a:p>
         </p:txBody>
       </p:sp>
@@ -37295,6 +36943,7 @@
           <a:lstStyle/>
           <a:p>
             <a:pPr algn="ctr"/>
+            <a:endParaRPr/>
           </a:p>
         </p:txBody>
       </p:sp>
@@ -38096,6 +37745,7 @@
           <a:lstStyle/>
           <a:p>
             <a:pPr algn="ctr"/>
+            <a:endParaRPr/>
           </a:p>
         </p:txBody>
       </p:sp>
@@ -38751,6 +38401,7 @@
           <a:lstStyle/>
           <a:p>
             <a:pPr algn="ctr"/>
+            <a:endParaRPr/>
           </a:p>
         </p:txBody>
       </p:sp>
